--- a/Foundation_F4/Workshop/F4-W01_Apply_Workshop_L01-L02_Helping_a_New_Student.pptx
+++ b/Foundation_F4/Workshop/F4-W01_Apply_Workshop_L01-L02_Helping_a_New_Student.pptx
@@ -7436,7 +7436,7 @@
                 <a:latin typeface="Calibri" pitchFamily="34" charset="0"/>
                 <a:cs typeface="Amiri" pitchFamily="2" charset="-78"/>
               </a:rPr>
-              <a:t>Odd numbers come from F4-L01, even numbers from F4-L02. Core: a full sentence from the starter. Develop: add the “more” part. Stretch: link two answers with </a:t>
+              <a:t>Odd numbers come from F4-L01, even numbers from F4-L02. Core: a full sentence from the starter. Develop: add the “more” part. Stretch: link two answers with ‏</a:t>
             </a:r>
             <a:pPr algn="l" indent="0" marL="0">
               <a:buNone/>
@@ -7463,7 +7463,7 @@
                 <a:latin typeface="Calibri" pitchFamily="34" charset="0"/>
                 <a:cs typeface="Amiri" pitchFamily="2" charset="-78"/>
               </a:rPr>
-              <a:t>, </a:t>
+              <a:t>‏, ‏</a:t>
             </a:r>
             <a:pPr algn="l" indent="0" marL="0">
               <a:buNone/>
@@ -7490,7 +7490,7 @@
                 <a:latin typeface="Calibri" pitchFamily="34" charset="0"/>
                 <a:cs typeface="Amiri" pitchFamily="2" charset="-78"/>
               </a:rPr>
-              <a:t> or </a:t>
+              <a:t>‏ or ‏</a:t>
             </a:r>
             <a:pPr algn="l" indent="0" marL="0">
               <a:buNone/>
@@ -7517,7 +7517,7 @@
                 <a:latin typeface="Calibri" pitchFamily="34" charset="0"/>
                 <a:cs typeface="Amiri" pitchFamily="2" charset="-78"/>
               </a:rPr>
-              <a:t>. Swap after each question.</a:t>
+              <a:t>‏. Swap after each question.</a:t>
             </a:r>
             <a:endParaRPr lang="en-US" sz="1100" dirty="0"/>
           </a:p>
@@ -10840,7 +10840,7 @@
                 <a:latin typeface="Calibri" pitchFamily="34" charset="0"/>
                 <a:cs typeface="Amiri" pitchFamily="2" charset="-78"/>
               </a:rPr>
-              <a:t>Add one time and the order: </a:t>
+              <a:t>Add one time and the order: ‏</a:t>
             </a:r>
             <a:pPr algn="l" indent="0" marL="0">
               <a:buNone/>
@@ -10894,7 +10894,7 @@
                 <a:latin typeface="Calibri" pitchFamily="34" charset="0"/>
                 <a:cs typeface="Amiri" pitchFamily="2" charset="-78"/>
               </a:rPr>
-              <a:t> …</a:t>
+              <a:t> …‏</a:t>
             </a:r>
             <a:endParaRPr lang="en-US" sz="1150" dirty="0"/>
           </a:p>
@@ -11031,7 +11031,7 @@
                 <a:latin typeface="Calibri" pitchFamily="34" charset="0"/>
                 <a:cs typeface="Amiri" pitchFamily="2" charset="-78"/>
               </a:rPr>
-              <a:t>Give two reasons that agree (</a:t>
+              <a:t>Give two reasons that agree (‏</a:t>
             </a:r>
             <a:pPr algn="l" indent="0" marL="0">
               <a:buNone/>
@@ -11058,7 +11058,7 @@
                 <a:latin typeface="Calibri" pitchFamily="34" charset="0"/>
                 <a:cs typeface="Amiri" pitchFamily="2" charset="-78"/>
               </a:rPr>
-              <a:t>) and a “but” (</a:t>
+              <a:t>‏) and a “but” (‏</a:t>
             </a:r>
             <a:pPr algn="l" indent="0" marL="0">
               <a:buNone/>
@@ -11085,7 +11085,7 @@
                 <a:latin typeface="Calibri" pitchFamily="34" charset="0"/>
                 <a:cs typeface="Amiri" pitchFamily="2" charset="-78"/>
               </a:rPr>
-              <a:t>).</a:t>
+              <a:t>‏).</a:t>
             </a:r>
             <a:endParaRPr lang="en-US" sz="1150" dirty="0"/>
           </a:p>
@@ -17448,7 +17448,7 @@
                 <a:latin typeface="Calibri" pitchFamily="34" charset="0"/>
                 <a:cs typeface="Amiri" pitchFamily="2" charset="-78"/>
               </a:rPr>
-              <a:t>Non-human plural → feminine singular: </a:t>
+              <a:t>Non-human plural → feminine singular: ‏</a:t>
             </a:r>
             <a:pPr algn="l" indent="0" marL="0">
               <a:buNone/>
@@ -17475,7 +17475,7 @@
                 <a:latin typeface="Calibri" pitchFamily="34" charset="0"/>
                 <a:cs typeface="Amiri" pitchFamily="2" charset="-78"/>
               </a:rPr>
-              <a:t>.</a:t>
+              <a:t>‏.</a:t>
             </a:r>
             <a:endParaRPr lang="en-US" sz="1150" dirty="0"/>
           </a:p>
@@ -17686,7 +17686,7 @@
                 <a:latin typeface="Calibri" pitchFamily="34" charset="0"/>
                 <a:cs typeface="Amiri" pitchFamily="2" charset="-78"/>
               </a:rPr>
-              <a:t>Clock time = feminine ordinal: </a:t>
+              <a:t>Clock time = feminine ordinal: ‏</a:t>
             </a:r>
             <a:pPr algn="l" indent="0" marL="0">
               <a:buNone/>
@@ -17713,7 +17713,7 @@
                 <a:latin typeface="Calibri" pitchFamily="34" charset="0"/>
                 <a:cs typeface="Amiri" pitchFamily="2" charset="-78"/>
               </a:rPr>
-              <a:t>.</a:t>
+              <a:t>‏.</a:t>
             </a:r>
             <a:endParaRPr lang="en-US" sz="1150" dirty="0"/>
           </a:p>
@@ -17917,6 +17917,19 @@
               <a:buNone/>
             </a:pPr>
             <a:r>
+              <a:rPr lang="en-US" sz="1150" b="1" dirty="0">
+                <a:solidFill>
+                  <a:srgbClr val="1B3B6F"/>
+                </a:solidFill>
+                <a:latin typeface="Calibri" pitchFamily="34" charset="0"/>
+                <a:cs typeface="Amiri" pitchFamily="2" charset="-78"/>
+              </a:rPr>
+              <a:t>‏</a:t>
+            </a:r>
+            <a:pPr algn="l" indent="0" marL="0">
+              <a:buNone/>
+            </a:pPr>
+            <a:r>
               <a:rPr lang="ar-SA" altLang="en-US" sz="1500" b="1" dirty="0">
                 <a:solidFill>
                   <a:srgbClr val="1B3B6F"/>
@@ -17938,7 +17951,7 @@
                 <a:latin typeface="Calibri" pitchFamily="34" charset="0"/>
                 <a:cs typeface="Amiri" pitchFamily="2" charset="-78"/>
               </a:rPr>
-              <a:t> agrees with </a:t>
+              <a:t>‏ agrees with ‏</a:t>
             </a:r>
             <a:pPr algn="l" indent="0" marL="0">
               <a:buNone/>
@@ -17965,7 +17978,7 @@
                 <a:latin typeface="Calibri" pitchFamily="34" charset="0"/>
                 <a:cs typeface="Amiri" pitchFamily="2" charset="-78"/>
               </a:rPr>
-              <a:t>.</a:t>
+              <a:t>‏.</a:t>
             </a:r>
             <a:endParaRPr lang="en-US" sz="1150" dirty="0"/>
           </a:p>
@@ -20165,7 +20178,7 @@
                 <a:latin typeface="Calibri" pitchFamily="34" charset="0"/>
                 <a:cs typeface="Amiri" pitchFamily="2" charset="-78"/>
               </a:rPr>
-              <a:t>☐  At least one </a:t>
+              <a:t>☐  At least one ‏</a:t>
             </a:r>
             <a:pPr algn="l" indent="0" marL="0">
               <a:buNone/>
@@ -20192,7 +20205,7 @@
                 <a:latin typeface="Calibri" pitchFamily="34" charset="0"/>
                 <a:cs typeface="Amiri" pitchFamily="2" charset="-78"/>
               </a:rPr>
-              <a:t> and one </a:t>
+              <a:t>‏ and one ‏</a:t>
             </a:r>
             <a:pPr algn="l" indent="0" marL="0">
               <a:buNone/>
@@ -20219,7 +20232,7 @@
                 <a:latin typeface="Calibri" pitchFamily="34" charset="0"/>
                 <a:cs typeface="Amiri" pitchFamily="2" charset="-78"/>
               </a:rPr>
-              <a:t> (Develop).</a:t>
+              <a:t>‏ (Develop).</a:t>
             </a:r>
             <a:endParaRPr lang="en-US" sz="1200" dirty="0"/>
           </a:p>
@@ -23767,7 +23780,7 @@
                 <a:latin typeface="Calibri" pitchFamily="34" charset="0"/>
                 <a:cs typeface="Amiri" pitchFamily="2" charset="-78"/>
               </a:rPr>
-              <a:t>use </a:t>
+              <a:t>use ‏</a:t>
             </a:r>
             <a:pPr algn="l" indent="0" marL="0">
               <a:buNone/>
@@ -23794,7 +23807,7 @@
                 <a:latin typeface="Calibri" pitchFamily="34" charset="0"/>
                 <a:cs typeface="Amiri" pitchFamily="2" charset="-78"/>
               </a:rPr>
-              <a:t> + day and put the lessons in order?</a:t>
+              <a:t>‏ + day and put the lessons in order?</a:t>
             </a:r>
             <a:endParaRPr lang="en-US" sz="1100" dirty="0"/>
           </a:p>
@@ -23953,7 +23966,7 @@
                 <a:latin typeface="Calibri" pitchFamily="34" charset="0"/>
                 <a:cs typeface="Amiri" pitchFamily="2" charset="-78"/>
               </a:rPr>
-              <a:t>use linking words (</a:t>
+              <a:t>use linking words (‏</a:t>
             </a:r>
             <a:pPr algn="l" indent="0" marL="0">
               <a:buNone/>
@@ -24061,7 +24074,7 @@
                 <a:latin typeface="Calibri" pitchFamily="34" charset="0"/>
                 <a:cs typeface="Amiri" pitchFamily="2" charset="-78"/>
               </a:rPr>
-              <a:t>)?</a:t>
+              <a:t>‏)?</a:t>
             </a:r>
             <a:endParaRPr lang="en-US" sz="1100" dirty="0"/>
           </a:p>
@@ -28007,7 +28020,7 @@
                 <a:latin typeface="Calibri" pitchFamily="34" charset="0"/>
                 <a:cs typeface="Amiri" pitchFamily="2" charset="-78"/>
               </a:rPr>
-              <a:t>I added reasons (</a:t>
+              <a:t>I added reasons (‏</a:t>
             </a:r>
             <a:pPr algn="l" indent="0" marL="0">
               <a:buNone/>
@@ -28034,7 +28047,7 @@
                 <a:latin typeface="Calibri" pitchFamily="34" charset="0"/>
                 <a:cs typeface="Amiri" pitchFamily="2" charset="-78"/>
               </a:rPr>
-              <a:t>) and extra details without frames.</a:t>
+              <a:t>‏) and extra details without frames.</a:t>
             </a:r>
             <a:endParaRPr lang="en-US" sz="1300" dirty="0"/>
           </a:p>
@@ -32162,7 +32175,7 @@
                 <a:latin typeface="Calibri" pitchFamily="34" charset="0"/>
                 <a:cs typeface="Amiri" pitchFamily="2" charset="-78"/>
               </a:rPr>
-              <a:t>☐  Add a reason (</a:t>
+              <a:t>☐  Add a reason (‏</a:t>
             </a:r>
             <a:pPr algn="l" indent="0" marL="0">
               <a:buNone/>
@@ -32189,7 +32202,7 @@
                 <a:latin typeface="Calibri" pitchFamily="34" charset="0"/>
                 <a:cs typeface="Amiri" pitchFamily="2" charset="-78"/>
               </a:rPr>
-              <a:t>) and an extra detail to every point.</a:t>
+              <a:t>‏) and an extra detail to every point.</a:t>
             </a:r>
             <a:endParaRPr lang="en-US" sz="1300" dirty="0"/>
           </a:p>
@@ -33710,7 +33723,7 @@
                 <a:latin typeface="Calibri" pitchFamily="34" charset="0"/>
                 <a:cs typeface="Amiri" pitchFamily="2" charset="-78"/>
               </a:rPr>
-              <a:t>Join a word from each lesson in one sentence with </a:t>
+              <a:t>Join a word from each lesson in one sentence with ‏</a:t>
             </a:r>
             <a:pPr algn="l" indent="0" marL="0">
               <a:buNone/>
@@ -33737,7 +33750,7 @@
                 <a:latin typeface="Calibri" pitchFamily="34" charset="0"/>
                 <a:cs typeface="Amiri" pitchFamily="2" charset="-78"/>
               </a:rPr>
-              <a:t> or </a:t>
+              <a:t>‏ or ‏</a:t>
             </a:r>
             <a:pPr algn="l" indent="0" marL="0">
               <a:buNone/>
@@ -33764,7 +33777,7 @@
                 <a:latin typeface="Calibri" pitchFamily="34" charset="0"/>
                 <a:cs typeface="Amiri" pitchFamily="2" charset="-78"/>
               </a:rPr>
-              <a:t>.</a:t>
+              <a:t>‏.</a:t>
             </a:r>
             <a:endParaRPr lang="en-US" sz="1150" dirty="0"/>
           </a:p>
